--- a/fixtures/sample-media.pptx
+++ b/fixtures/sample-media.pptx
@@ -3284,6 +3284,73 @@
       </p:pic>
     </p:spTree>
   </p:cSld>
+  <p:timing>
+    <p:tnLst>
+      <p:par>
+        <p:cTn id="1" dur="indefinite" restart="never" nodeType="tmRoot">
+          <p:childTnLst>
+            <p:seq concurrent="1" nextAc="seek">
+              <p:cTn id="2" dur="indefinite" nodeType="mainSeq">
+                <p:childTnLst>
+                  <p:par>
+                    <p:cTn id="3" fill="hold">
+                      <p:stCondLst>
+                        <p:cond delay="indefinite"/>
+                      </p:stCondLst>
+                      <p:childTnLst>
+                        <p:par>
+                          <p:cTn id="4" fill="hold">
+                            <p:stCondLst>
+                              <p:cond delay="0"/>
+                            </p:stCondLst>
+                            <p:childTnLst>
+                              <p:audio>
+                                <p:cMediaNode vol="80000">
+                                  <p:cTn id="5" fill="hold" display="0">
+                                    <p:stCondLst>
+                                      <p:cond delay="0"/>
+                                    </p:stCondLst>
+                                  </p:cTn>
+                                  <p:tgtEl>
+                                    <p:spTgt spid="502"/>
+                                  </p:tgtEl>
+                                </p:cMediaNode>
+                              </p:audio>
+                            </p:childTnLst>
+                          </p:cTn>
+                        </p:par>
+                      </p:childTnLst>
+                    </p:cTn>
+                  </p:par>
+                  <p:par>
+                    <p:cTn id="6" fill="hold">
+                      <p:stCondLst>
+                        <p:cond delay="indefinite"/>
+                      </p:stCondLst>
+                      <p:childTnLst>
+                        <p:audio>
+                          <p:cMediaNode vol="50000" mute="1">
+                            <p:cTn id="7" fill="hold" display="0" repeatCount="indefinite" nodeType="clickEffect">
+                              <p:stCondLst>
+                                <p:cond delay="0"/>
+                              </p:stCondLst>
+                            </p:cTn>
+                            <p:tgtEl>
+                              <p:spTgt spid="505"/>
+                            </p:tgtEl>
+                          </p:cMediaNode>
+                        </p:audio>
+                      </p:childTnLst>
+                    </p:cTn>
+                  </p:par>
+                </p:childTnLst>
+              </p:cTn>
+            </p:seq>
+          </p:childTnLst>
+        </p:cTn>
+      </p:par>
+    </p:tnLst>
+  </p:timing>
   <p:clrMapOvr>
     <a:masterClrMapping/>
   </p:clrMapOvr>
